--- a/slides/03.pptx
+++ b/slides/03.pptx
@@ -536,6 +536,189 @@
 </p:notesMaster>
 </file>
 
+<file path=ppt/notesSlides/notesSlide1.xml><?xml version="1.0" encoding="utf-8"?>
+<p:notes xmlns:a="http://schemas.openxmlformats.org/drawingml/2006/main" xmlns:r="http://schemas.openxmlformats.org/officeDocument/2006/relationships" xmlns:p="http://schemas.openxmlformats.org/presentationml/2006/main">
+  <p:cSld>
+    <p:spTree>
+      <p:nvGrpSpPr>
+        <p:cNvPr id="1" name=""/>
+        <p:cNvGrpSpPr/>
+        <p:nvPr/>
+      </p:nvGrpSpPr>
+      <p:grpSpPr>
+        <a:xfrm>
+          <a:off x="0" y="0"/>
+          <a:ext cx="0" cy="0"/>
+          <a:chOff x="0" y="0"/>
+          <a:chExt cx="0" cy="0"/>
+        </a:xfrm>
+      </p:grpSpPr>
+      <p:sp>
+        <p:nvSpPr>
+          <p:cNvPr id="2" name="スライド イメージ プレースホルダー 1"/>
+          <p:cNvSpPr>
+            <a:spLocks noGrp="1" noRot="1" noChangeAspect="1"/>
+          </p:cNvSpPr>
+          <p:nvPr>
+            <p:ph type="sldImg"/>
+          </p:nvPr>
+        </p:nvSpPr>
+        <p:spPr/>
+      </p:sp>
+      <p:sp>
+        <p:nvSpPr>
+          <p:cNvPr id="3" name="ノート プレースホルダー 2"/>
+          <p:cNvSpPr>
+            <a:spLocks noGrp="1"/>
+          </p:cNvSpPr>
+          <p:nvPr>
+            <p:ph type="body" idx="1"/>
+          </p:nvPr>
+        </p:nvSpPr>
+        <p:spPr/>
+        <p:txBody>
+          <a:bodyPr/>
+          <a:lstStyle/>
+          <a:p>
+            <a:endParaRPr kumimoji="1" lang="ja-JP" altLang="en-US"/>
+          </a:p>
+        </p:txBody>
+      </p:sp>
+    </p:spTree>
+    <p:extLst>
+      <p:ext uri="{BB962C8B-B14F-4D97-AF65-F5344CB8AC3E}">
+        <p14:creationId xmlns:p14="http://schemas.microsoft.com/office/powerpoint/2010/main" val="1327332760"/>
+      </p:ext>
+    </p:extLst>
+  </p:cSld>
+  <p:clrMapOvr>
+    <a:masterClrMapping/>
+  </p:clrMapOvr>
+</p:notes>
+</file>
+
+<file path=ppt/notesSlides/notesSlide2.xml><?xml version="1.0" encoding="utf-8"?>
+<p:notes xmlns:a="http://schemas.openxmlformats.org/drawingml/2006/main" xmlns:r="http://schemas.openxmlformats.org/officeDocument/2006/relationships" xmlns:p="http://schemas.openxmlformats.org/presentationml/2006/main">
+  <p:cSld>
+    <p:spTree>
+      <p:nvGrpSpPr>
+        <p:cNvPr id="1" name=""/>
+        <p:cNvGrpSpPr/>
+        <p:nvPr/>
+      </p:nvGrpSpPr>
+      <p:grpSpPr>
+        <a:xfrm>
+          <a:off x="0" y="0"/>
+          <a:ext cx="0" cy="0"/>
+          <a:chOff x="0" y="0"/>
+          <a:chExt cx="0" cy="0"/>
+        </a:xfrm>
+      </p:grpSpPr>
+      <p:sp>
+        <p:nvSpPr>
+          <p:cNvPr id="2" name="スライド イメージ プレースホルダー 1"/>
+          <p:cNvSpPr>
+            <a:spLocks noGrp="1" noRot="1" noChangeAspect="1"/>
+          </p:cNvSpPr>
+          <p:nvPr>
+            <p:ph type="sldImg"/>
+          </p:nvPr>
+        </p:nvSpPr>
+        <p:spPr/>
+      </p:sp>
+      <p:sp>
+        <p:nvSpPr>
+          <p:cNvPr id="3" name="ノート プレースホルダー 2"/>
+          <p:cNvSpPr>
+            <a:spLocks noGrp="1"/>
+          </p:cNvSpPr>
+          <p:nvPr>
+            <p:ph type="body" idx="1"/>
+          </p:nvPr>
+        </p:nvSpPr>
+        <p:spPr/>
+        <p:txBody>
+          <a:bodyPr/>
+          <a:lstStyle/>
+          <a:p>
+            <a:endParaRPr kumimoji="1" lang="ja-JP" altLang="en-US"/>
+          </a:p>
+        </p:txBody>
+      </p:sp>
+    </p:spTree>
+    <p:extLst>
+      <p:ext uri="{BB962C8B-B14F-4D97-AF65-F5344CB8AC3E}">
+        <p14:creationId xmlns:p14="http://schemas.microsoft.com/office/powerpoint/2010/main" val="3875721970"/>
+      </p:ext>
+    </p:extLst>
+  </p:cSld>
+  <p:clrMapOvr>
+    <a:masterClrMapping/>
+  </p:clrMapOvr>
+</p:notes>
+</file>
+
+<file path=ppt/notesSlides/notesSlide3.xml><?xml version="1.0" encoding="utf-8"?>
+<p:notes xmlns:a="http://schemas.openxmlformats.org/drawingml/2006/main" xmlns:r="http://schemas.openxmlformats.org/officeDocument/2006/relationships" xmlns:p="http://schemas.openxmlformats.org/presentationml/2006/main">
+  <p:cSld>
+    <p:spTree>
+      <p:nvGrpSpPr>
+        <p:cNvPr id="1" name=""/>
+        <p:cNvGrpSpPr/>
+        <p:nvPr/>
+      </p:nvGrpSpPr>
+      <p:grpSpPr>
+        <a:xfrm>
+          <a:off x="0" y="0"/>
+          <a:ext cx="0" cy="0"/>
+          <a:chOff x="0" y="0"/>
+          <a:chExt cx="0" cy="0"/>
+        </a:xfrm>
+      </p:grpSpPr>
+      <p:sp>
+        <p:nvSpPr>
+          <p:cNvPr id="2" name="スライド イメージ プレースホルダー 1"/>
+          <p:cNvSpPr>
+            <a:spLocks noGrp="1" noRot="1" noChangeAspect="1"/>
+          </p:cNvSpPr>
+          <p:nvPr>
+            <p:ph type="sldImg"/>
+          </p:nvPr>
+        </p:nvSpPr>
+        <p:spPr/>
+      </p:sp>
+      <p:sp>
+        <p:nvSpPr>
+          <p:cNvPr id="3" name="ノート プレースホルダー 2"/>
+          <p:cNvSpPr>
+            <a:spLocks noGrp="1"/>
+          </p:cNvSpPr>
+          <p:nvPr>
+            <p:ph type="body" idx="1"/>
+          </p:nvPr>
+        </p:nvSpPr>
+        <p:spPr/>
+        <p:txBody>
+          <a:bodyPr/>
+          <a:lstStyle/>
+          <a:p>
+            <a:endParaRPr kumimoji="1" lang="ja-JP" altLang="en-US"/>
+          </a:p>
+        </p:txBody>
+      </p:sp>
+    </p:spTree>
+    <p:extLst>
+      <p:ext uri="{BB962C8B-B14F-4D97-AF65-F5344CB8AC3E}">
+        <p14:creationId xmlns:p14="http://schemas.microsoft.com/office/powerpoint/2010/main" val="2266736152"/>
+      </p:ext>
+    </p:extLst>
+  </p:cSld>
+  <p:clrMapOvr>
+    <a:masterClrMapping/>
+  </p:clrMapOvr>
+</p:notes>
+</file>
+
 <file path=ppt/slideLayouts/slideLayout1.xml><?xml version="1.0" encoding="utf-8"?>
 <p:sldLayout xmlns:a="http://schemas.openxmlformats.org/drawingml/2006/main" xmlns:r="http://schemas.openxmlformats.org/officeDocument/2006/relationships" xmlns:p="http://schemas.openxmlformats.org/presentationml/2006/main" type="title">
   <p:cSld name="タイトル&amp;サブタイトル">
@@ -1949,7 +2132,7 @@
           </a:ln>
           <a:extLst>
             <a:ext uri="{C572A759-6A51-4108-AA02-DFA0A04FC94B}">
-              <ma14:wrappingTextBoxFlag xmlns="" xmlns:m="http://schemas.openxmlformats.org/officeDocument/2006/math" xmlns:a14="http://schemas.microsoft.com/office/drawing/2010/main" xmlns:ma14="http://schemas.microsoft.com/office/mac/drawingml/2011/main" val="1"/>
+              <ma14:wrappingTextBoxFlag xmlns:ma14="http://schemas.microsoft.com/office/mac/drawingml/2011/main" xmlns:a14="http://schemas.microsoft.com/office/drawing/2010/main" xmlns:m="http://schemas.openxmlformats.org/officeDocument/2006/math" xmlns="" val="1"/>
             </a:ext>
           </a:extLst>
         </p:spPr>
@@ -2035,7 +2218,7 @@
           </a:ln>
           <a:extLst>
             <a:ext uri="{C572A759-6A51-4108-AA02-DFA0A04FC94B}">
-              <ma14:wrappingTextBoxFlag xmlns="" xmlns:m="http://schemas.openxmlformats.org/officeDocument/2006/math" xmlns:a14="http://schemas.microsoft.com/office/drawing/2010/main" xmlns:ma14="http://schemas.microsoft.com/office/mac/drawingml/2011/main" val="1"/>
+              <ma14:wrappingTextBoxFlag xmlns:ma14="http://schemas.microsoft.com/office/mac/drawingml/2011/main" xmlns:a14="http://schemas.microsoft.com/office/drawing/2010/main" xmlns:m="http://schemas.openxmlformats.org/officeDocument/2006/math" xmlns="" val="1"/>
             </a:ext>
           </a:extLst>
         </p:spPr>
@@ -4197,7 +4380,12 @@
             <p:ph type="body" idx="1"/>
           </p:nvPr>
         </p:nvSpPr>
-        <p:spPr/>
+        <p:spPr>
+          <a:xfrm>
+            <a:off x="1515747" y="2695303"/>
+            <a:ext cx="14800185" cy="6286500"/>
+          </a:xfrm>
+        </p:spPr>
         <p:txBody>
           <a:bodyPr>
             <a:normAutofit fontScale="85000" lnSpcReduction="20000"/>
@@ -8177,7 +8365,7 @@
           <p:nvPr/>
         </p:nvPicPr>
         <p:blipFill>
-          <a:blip r:embed="rId2">
+          <a:blip r:embed="rId3">
             <a:extLst>
               <a:ext uri="{28A0092B-C50C-407E-A947-70E740481C1C}">
                 <a14:useLocalDpi xmlns:a14="http://schemas.microsoft.com/office/drawing/2010/main" val="0"/>
@@ -10913,8 +11101,16 @@
           <a:lstStyle/>
           <a:p>
             <a:r>
+              <a:rPr lang="ja-JP" altLang="en-US" sz="6000" dirty="0">
+                <a:highlight>
+                  <a:srgbClr val="00FFFF"/>
+                </a:highlight>
+              </a:rPr>
+              <a:t>垂直的</a:t>
+            </a:r>
+            <a:r>
               <a:rPr lang="ja-JP" altLang="en-US" sz="6000" dirty="0"/>
-              <a:t>垂直的外国直接投資</a:t>
+              <a:t>外国直接投資</a:t>
             </a:r>
             <a:endParaRPr kumimoji="1" lang="ja-JP" altLang="en-US" sz="6000" dirty="0"/>
           </a:p>
@@ -10990,7 +11186,19 @@
           <a:p>
             <a:r>
               <a:rPr lang="zh-CN" altLang="en-US" dirty="0"/>
-              <a:t>「生産費用節約型」</a:t>
+              <a:t>「</a:t>
+            </a:r>
+            <a:r>
+              <a:rPr lang="zh-CN" altLang="en-US" dirty="0">
+                <a:highlight>
+                  <a:srgbClr val="00FFFF"/>
+                </a:highlight>
+              </a:rPr>
+              <a:t>生産費用節約型</a:t>
+            </a:r>
+            <a:r>
+              <a:rPr lang="zh-CN" altLang="en-US" dirty="0"/>
+              <a:t>」</a:t>
             </a:r>
             <a:endParaRPr lang="en-US" altLang="ja-JP" dirty="0"/>
           </a:p>
